--- a/classes/parte-17-profundizacion-para-certificaciones/314-federacion-sso-saml-y-openid-connect/clase-314-presentacion.pptx
+++ b/classes/parte-17-profundizacion-para-certificaciones/314-federacion-sso-saml-y-openid-connect/clase-314-presentacion.pptx
@@ -17,6 +17,10 @@
     <p:sldId id="265" r:id="rId16"/>
     <p:sldId id="266" r:id="rId17"/>
     <p:sldId id="267" r:id="rId18"/>
+    <p:sldId id="268" r:id="rId19"/>
+    <p:sldId id="269" r:id="rId20"/>
+    <p:sldId id="270" r:id="rId21"/>
+    <p:sldId id="271" r:id="rId22"/>
   </p:sldIdLst>
   <p:sldSz cx="9144000" cy="6858000" type="screen4x3"/>
   <p:notesSz cx="6858000" cy="9144000"/>
@@ -3198,7 +3202,7 @@
                   <a:srgbClr val="0B3D2E"/>
                 </a:solidFill>
               </a:rPr>
-              <a:t>⚠️ Errores comunes</a:t>
+              <a:t>🧪 Laboratorio guiado — Trazar flujos y diseñar una confianza federada</a:t>
             </a:r>
           </a:p>
         </p:txBody>
@@ -3236,82 +3240,97 @@
                   <a:srgbClr val="22282E"/>
                 </a:solidFill>
               </a:rPr>
-              <a:t>•  Usar OAuth 2.0 "para login" y confiar el access token como identidad — OAuth autoriza, no autentica. Usa OIDC y valida el ID Token.</a:t>
-            </a:r>
-          </a:p>
-          <a:p>
-            <a:pPr>
-              <a:spcAft>
-                <a:spcPts val="600"/>
-              </a:spcAft>
-            </a:pPr>
-            <a:r>
-              <a:rPr sz="1500">
-                <a:solidFill>
-                  <a:srgbClr val="22282E"/>
-                </a:solidFill>
-              </a:rPr>
-              <a:t>•  Invalid signature en la SAMLResponse — Certificado de firma incorrecto o caducado en los metadatos. Rota y actualiza los metadatos del SP.</a:t>
-            </a:r>
-          </a:p>
-          <a:p>
-            <a:pPr>
-              <a:spcAft>
-                <a:spcPts val="600"/>
-              </a:spcAft>
-            </a:pPr>
-            <a:r>
-              <a:rPr sz="1500">
-                <a:solidFill>
-                  <a:srgbClr val="22282E"/>
-                </a:solidFill>
-              </a:rPr>
-              <a:t>•  ID Token aceptado sin validar aud/iss/exp — Permite tokens de otro cliente o expirados. Valida siempre todos los claims.</a:t>
-            </a:r>
-          </a:p>
-          <a:p>
-            <a:pPr>
-              <a:spcAft>
-                <a:spcPts val="600"/>
-              </a:spcAft>
-            </a:pPr>
-            <a:r>
-              <a:rPr sz="1500">
-                <a:solidFill>
-                  <a:srgbClr val="22282E"/>
-                </a:solidFill>
-              </a:rPr>
-              <a:t>•  SSO habilitado sin MFA en el IdP — El IdP se vuelve un único punto de fallo. Refuerza el IdP con MFA fuerte.</a:t>
-            </a:r>
-          </a:p>
-          <a:p>
-            <a:pPr>
-              <a:spcAft>
-                <a:spcPts val="600"/>
-              </a:spcAft>
-            </a:pPr>
-            <a:r>
-              <a:rPr sz="1500">
-                <a:solidFill>
-                  <a:srgbClr val="22282E"/>
-                </a:solidFill>
-              </a:rPr>
-              <a:t>•  Reutilizar el mismo RelayState/sin nonce — Expone a replay/CSRF. Usa nonce/state de un solo uso y TLS.</a:t>
-            </a:r>
-          </a:p>
-          <a:p>
-            <a:pPr>
-              <a:spcAft>
-                <a:spcPts val="600"/>
-              </a:spcAft>
-            </a:pPr>
-            <a:r>
-              <a:rPr sz="1500">
-                <a:solidFill>
-                  <a:srgbClr val="22282E"/>
-                </a:solidFill>
-              </a:rPr>
-              <a:t>•  Aprovisionar JIT sin filtrar claims — Se crean cuentas con roles indebidos. Mapea claims a roles con reglas explícitas.</a:t>
+              <a:t>•  Mapa de actores. Para "NovaSalud", identifica el IdP corporativo y 2 SP/RP (un portal</a:t>
+            </a:r>
+          </a:p>
+          <a:p>
+            <a:pPr>
+              <a:spcAft>
+                <a:spcPts val="600"/>
+              </a:spcAft>
+            </a:pPr>
+            <a:r>
+              <a:rPr sz="1500">
+                <a:solidFill>
+                  <a:srgbClr val="22282E"/>
+                </a:solidFill>
+              </a:rPr>
+              <a:t>•  web interno vía SAML y una app móvil vía OIDC). Dibuja quién confía en quién.</a:t>
+            </a:r>
+          </a:p>
+          <a:p>
+            <a:pPr>
+              <a:spcAft>
+                <a:spcPts val="600"/>
+              </a:spcAft>
+            </a:pPr>
+            <a:r>
+              <a:rPr sz="1500">
+                <a:solidFill>
+                  <a:srgbClr val="22282E"/>
+                </a:solidFill>
+              </a:rPr>
+              <a:t>•  Flujo SAML SP-initiated. Traza los pasos: (1) usuario accede al SP → (2) SP redirige al IdP</a:t>
+            </a:r>
+          </a:p>
+          <a:p>
+            <a:pPr>
+              <a:spcAft>
+                <a:spcPts val="600"/>
+              </a:spcAft>
+            </a:pPr>
+            <a:r>
+              <a:rPr sz="1500">
+                <a:solidFill>
+                  <a:srgbClr val="22282E"/>
+                </a:solidFill>
+              </a:rPr>
+              <a:t>•  con un SAMLRequest → (3) IdP autentica → (4) IdP devuelve una SAMLResponse con la aserción</a:t>
+            </a:r>
+          </a:p>
+          <a:p>
+            <a:pPr>
+              <a:spcAft>
+                <a:spcPts val="600"/>
+              </a:spcAft>
+            </a:pPr>
+            <a:r>
+              <a:rPr sz="1500">
+                <a:solidFill>
+                  <a:srgbClr val="22282E"/>
+                </a:solidFill>
+              </a:rPr>
+              <a:t>•  firmada → (5) SP valida la firma y crea la sesión. Anota qué se firma y por qué.</a:t>
+            </a:r>
+          </a:p>
+          <a:p>
+            <a:pPr>
+              <a:spcAft>
+                <a:spcPts val="600"/>
+              </a:spcAft>
+            </a:pPr>
+            <a:r>
+              <a:rPr sz="1500">
+                <a:solidFill>
+                  <a:srgbClr val="22282E"/>
+                </a:solidFill>
+              </a:rPr>
+              <a:t>•  Metadatos y confianza. Documenta cómo se establece el trust: intercambio de metadatos</a:t>
+            </a:r>
+          </a:p>
+          <a:p>
+            <a:pPr>
+              <a:spcAft>
+                <a:spcPts val="600"/>
+              </a:spcAft>
+            </a:pPr>
+            <a:r>
+              <a:rPr sz="1500">
+                <a:solidFill>
+                  <a:srgbClr val="22282E"/>
+                </a:solidFill>
+              </a:rPr>
+              <a:t>•  (EntityID, endpoints ACS/SSO, certificado público de firma). Explica qué pasa si el certificado caduca.</a:t>
             </a:r>
           </a:p>
         </p:txBody>
@@ -3362,7 +3381,7 @@
                   <a:srgbClr val="0B3D2E"/>
                 </a:solidFill>
               </a:rPr>
-              <a:t>❓ Preguntas frecuentes</a:t>
+              <a:t>✍️ Ejercicios</a:t>
             </a:r>
           </a:p>
         </p:txBody>
@@ -3400,97 +3419,82 @@
                   <a:srgbClr val="22282E"/>
                 </a:solidFill>
               </a:rPr>
-              <a:t>•  ❓ ¿SAML o OIDC para una nueva aplicación?</a:t>
-            </a:r>
-          </a:p>
-          <a:p>
-            <a:pPr>
-              <a:spcAft>
-                <a:spcPts val="600"/>
-              </a:spcAft>
-            </a:pPr>
-            <a:r>
-              <a:rPr sz="1500">
-                <a:solidFill>
-                  <a:srgbClr val="22282E"/>
-                </a:solidFill>
-              </a:rPr>
-              <a:t>•  Para web empresarial con muchos SP legados, SAML sigue siendo común. Para móvil, SPA y APIs,</a:t>
-            </a:r>
-          </a:p>
-          <a:p>
-            <a:pPr>
-              <a:spcAft>
-                <a:spcPts val="600"/>
-              </a:spcAft>
-            </a:pPr>
-            <a:r>
-              <a:rPr sz="1500">
-                <a:solidFill>
-                  <a:srgbClr val="22282E"/>
-                </a:solidFill>
-              </a:rPr>
-              <a:t>•  OIDC (JSON/JWT, más ligero) es la elección moderna. Muchas organizaciones soportan ambos en su IdP.</a:t>
-            </a:r>
-          </a:p>
-          <a:p>
-            <a:pPr>
-              <a:spcAft>
-                <a:spcPts val="600"/>
-              </a:spcAft>
-            </a:pPr>
-            <a:r>
-              <a:rPr sz="1500">
-                <a:solidFill>
-                  <a:srgbClr val="22282E"/>
-                </a:solidFill>
-              </a:rPr>
-              <a:t>•  ❓ ¿La federación aumenta o reduce el riesgo?</a:t>
-            </a:r>
-          </a:p>
-          <a:p>
-            <a:pPr>
-              <a:spcAft>
-                <a:spcPts val="600"/>
-              </a:spcAft>
-            </a:pPr>
-            <a:r>
-              <a:rPr sz="1500">
-                <a:solidFill>
-                  <a:srgbClr val="22282E"/>
-                </a:solidFill>
-              </a:rPr>
-              <a:t>•  Ambos. Reduce contraseñas dispersas y centraliza la política, pero concentra el riesgo en el IdP:</a:t>
-            </a:r>
-          </a:p>
-          <a:p>
-            <a:pPr>
-              <a:spcAft>
-                <a:spcPts val="600"/>
-              </a:spcAft>
-            </a:pPr>
-            <a:r>
-              <a:rPr sz="1500">
-                <a:solidFill>
-                  <a:srgbClr val="22282E"/>
-                </a:solidFill>
-              </a:rPr>
-              <a:t>•  si cae o es comprometido, afecta a todo. Por eso el IdP exige MFA fuerte y monitorización.</a:t>
-            </a:r>
-          </a:p>
-          <a:p>
-            <a:pPr>
-              <a:spcAft>
-                <a:spcPts val="600"/>
-              </a:spcAft>
-            </a:pPr>
-            <a:r>
-              <a:rPr sz="1500">
-                <a:solidFill>
-                  <a:srgbClr val="22282E"/>
-                </a:solidFill>
-              </a:rPr>
-              <a:t>•  ❓ ¿Qué diferencia hay entre un access token y un ID token?</a:t>
+              <a:t>•  Explica con tus palabras por qué OAuth 2.0 solo no debe usarse para "iniciar sesión".</a:t>
+            </a:r>
+          </a:p>
+          <a:p>
+            <a:pPr>
+              <a:spcAft>
+                <a:spcPts val="600"/>
+              </a:spcAft>
+            </a:pPr>
+            <a:r>
+              <a:rPr sz="1500">
+                <a:solidFill>
+                  <a:srgbClr val="22282E"/>
+                </a:solidFill>
+              </a:rPr>
+              <a:t>•  Ordena correctamente los pasos desordenados de un flujo SAML SP-initiated.</a:t>
+            </a:r>
+          </a:p>
+          <a:p>
+            <a:pPr>
+              <a:spcAft>
+                <a:spcPts val="600"/>
+              </a:spcAft>
+            </a:pPr>
+            <a:r>
+              <a:rPr sz="1500">
+                <a:solidFill>
+                  <a:srgbClr val="22282E"/>
+                </a:solidFill>
+              </a:rPr>
+              <a:t>•  Decodifica un ID Token de ejemplo y explica cada claim estándar.</a:t>
+            </a:r>
+          </a:p>
+          <a:p>
+            <a:pPr>
+              <a:spcAft>
+                <a:spcPts val="600"/>
+              </a:spcAft>
+            </a:pPr>
+            <a:r>
+              <a:rPr sz="1500">
+                <a:solidFill>
+                  <a:srgbClr val="22282E"/>
+                </a:solidFill>
+              </a:rPr>
+              <a:t>•  Diseña la tabla comparativa SAML vs. OIDC y recomienda uno para 3 escenarios distintos.</a:t>
+            </a:r>
+          </a:p>
+          <a:p>
+            <a:pPr>
+              <a:spcAft>
+                <a:spcPts val="600"/>
+              </a:spcAft>
+            </a:pPr>
+            <a:r>
+              <a:rPr sz="1500">
+                <a:solidFill>
+                  <a:srgbClr val="22282E"/>
+                </a:solidFill>
+              </a:rPr>
+              <a:t>•  Describe el ataque de XML Signature Wrapping a alto nivel y su mitigación defensiva.</a:t>
+            </a:r>
+          </a:p>
+          <a:p>
+            <a:pPr>
+              <a:spcAft>
+                <a:spcPts val="600"/>
+              </a:spcAft>
+            </a:pPr>
+            <a:r>
+              <a:rPr sz="1500">
+                <a:solidFill>
+                  <a:srgbClr val="22282E"/>
+                </a:solidFill>
+              </a:rPr>
+              <a:t>•  Dibuja el trust de una federación con 1 IdP y 3 SP e indica qué se comparte con cada uno.</a:t>
             </a:r>
           </a:p>
         </p:txBody>
@@ -3541,7 +3545,7 @@
                   <a:srgbClr val="0B3D2E"/>
                 </a:solidFill>
               </a:rPr>
-              <a:t>🔗 Referencias</a:t>
+              <a:t>📝 Reto verificable</a:t>
             </a:r>
           </a:p>
         </p:txBody>
@@ -3579,6 +3583,513 @@
                   <a:srgbClr val="22282E"/>
                 </a:solidFill>
               </a:rPr>
+              <a:t>•  Entrega un Diseño de Arquitectura de SSO Federado para NovaSalud que incluya: diagrama de</a:t>
+            </a:r>
+          </a:p>
+          <a:p>
+            <a:pPr>
+              <a:spcAft>
+                <a:spcPts val="600"/>
+              </a:spcAft>
+            </a:pPr>
+            <a:r>
+              <a:rPr sz="1500">
+                <a:solidFill>
+                  <a:srgbClr val="22282E"/>
+                </a:solidFill>
+              </a:rPr>
+              <a:t>•  actores (IdP/SP/RP), los dos flujos (SAML y OIDC) paso a paso, la tabla de metadatos/confianza, un</a:t>
+            </a:r>
+          </a:p>
+          <a:p>
+            <a:pPr>
+              <a:spcAft>
+                <a:spcPts val="600"/>
+              </a:spcAft>
+            </a:pPr>
+            <a:r>
+              <a:rPr sz="1500">
+                <a:solidFill>
+                  <a:srgbClr val="22282E"/>
+                </a:solidFill>
+              </a:rPr>
+              <a:t>•  modelo de amenazas con al menos 4 riesgos y mitigaciones, y la regla de aprovisionamiento JIT.</a:t>
+            </a:r>
+          </a:p>
+          <a:p>
+            <a:pPr>
+              <a:spcAft>
+                <a:spcPts val="600"/>
+              </a:spcAft>
+            </a:pPr>
+            <a:r>
+              <a:rPr sz="1500">
+                <a:solidFill>
+                  <a:srgbClr val="22282E"/>
+                </a:solidFill>
+              </a:rPr>
+              <a:t>•  Criterio de aceptación: un arquitecto que reciba tu diseño puede explicar, sin ayuda, qué</a:t>
+            </a:r>
+          </a:p>
+          <a:p>
+            <a:pPr>
+              <a:spcAft>
+                <a:spcPts val="600"/>
+              </a:spcAft>
+            </a:pPr>
+            <a:r>
+              <a:rPr sz="1500">
+                <a:solidFill>
+                  <a:srgbClr val="22282E"/>
+                </a:solidFill>
+              </a:rPr>
+              <a:t>•  sistema autentica, qué token viaja en cada flujo, qué se valida para aceptarlo y cómo se mitiga el</a:t>
+            </a:r>
+          </a:p>
+          <a:p>
+            <a:pPr>
+              <a:spcAft>
+                <a:spcPts val="600"/>
+              </a:spcAft>
+            </a:pPr>
+            <a:r>
+              <a:rPr sz="1500">
+                <a:solidFill>
+                  <a:srgbClr val="22282E"/>
+                </a:solidFill>
+              </a:rPr>
+              <a:t>•  robo de aserción/token.</a:t>
+            </a:r>
+          </a:p>
+        </p:txBody>
+      </p:sp>
+    </p:spTree>
+  </p:cSld>
+  <p:clrMapOvr>
+    <a:masterClrMapping/>
+  </p:clrMapOvr>
+</p:sld>
+</file>
+
+<file path=ppt/slides/slide13.xml><?xml version="1.0" encoding="utf-8"?>
+<p:sld xmlns:a="http://schemas.openxmlformats.org/drawingml/2006/main" xmlns:p="http://schemas.openxmlformats.org/presentationml/2006/main" xmlns:r="http://schemas.openxmlformats.org/officeDocument/2006/relationships">
+  <p:cSld>
+    <p:spTree>
+      <p:nvGrpSpPr>
+        <p:cNvPr id="1" name=""/>
+        <p:cNvGrpSpPr/>
+        <p:nvPr/>
+      </p:nvGrpSpPr>
+      <p:grpSpPr/>
+      <p:sp>
+        <p:nvSpPr>
+          <p:cNvPr id="2" name="TextBox 1"/>
+          <p:cNvSpPr txBox="1"/>
+          <p:nvPr/>
+        </p:nvSpPr>
+        <p:spPr>
+          <a:xfrm>
+            <a:off x="457200" y="320040"/>
+            <a:ext cx="8229600" cy="822960"/>
+          </a:xfrm>
+          <a:prstGeom prst="rect">
+            <a:avLst/>
+          </a:prstGeom>
+          <a:noFill/>
+        </p:spPr>
+        <p:txBody>
+          <a:bodyPr wrap="square">
+            <a:spAutoFit/>
+          </a:bodyPr>
+          <a:lstStyle/>
+          <a:p>
+            <a:r>
+              <a:rPr sz="2600" b="1">
+                <a:solidFill>
+                  <a:srgbClr val="0B3D2E"/>
+                </a:solidFill>
+              </a:rPr>
+              <a:t>⚠️ Errores comunes</a:t>
+            </a:r>
+          </a:p>
+        </p:txBody>
+      </p:sp>
+      <p:sp>
+        <p:nvSpPr>
+          <p:cNvPr id="3" name="TextBox 2"/>
+          <p:cNvSpPr txBox="1"/>
+          <p:nvPr/>
+        </p:nvSpPr>
+        <p:spPr>
+          <a:xfrm>
+            <a:off x="457200" y="1280160"/>
+            <a:ext cx="8229600" cy="4937760"/>
+          </a:xfrm>
+          <a:prstGeom prst="rect">
+            <a:avLst/>
+          </a:prstGeom>
+          <a:noFill/>
+        </p:spPr>
+        <p:txBody>
+          <a:bodyPr wrap="square">
+            <a:spAutoFit/>
+          </a:bodyPr>
+          <a:lstStyle/>
+          <a:p>
+            <a:pPr>
+              <a:spcAft>
+                <a:spcPts val="600"/>
+              </a:spcAft>
+            </a:pPr>
+            <a:r>
+              <a:rPr sz="1500">
+                <a:solidFill>
+                  <a:srgbClr val="22282E"/>
+                </a:solidFill>
+              </a:rPr>
+              <a:t>•  Usar OAuth 2.0 "para login" y confiar el access token como identidad — OAuth autoriza, no autentica. Usa OIDC y valida el ID Token.</a:t>
+            </a:r>
+          </a:p>
+          <a:p>
+            <a:pPr>
+              <a:spcAft>
+                <a:spcPts val="600"/>
+              </a:spcAft>
+            </a:pPr>
+            <a:r>
+              <a:rPr sz="1500">
+                <a:solidFill>
+                  <a:srgbClr val="22282E"/>
+                </a:solidFill>
+              </a:rPr>
+              <a:t>•  Invalid signature en la SAMLResponse — Certificado de firma incorrecto o caducado en los metadatos. Rota y actualiza los metadatos del SP.</a:t>
+            </a:r>
+          </a:p>
+          <a:p>
+            <a:pPr>
+              <a:spcAft>
+                <a:spcPts val="600"/>
+              </a:spcAft>
+            </a:pPr>
+            <a:r>
+              <a:rPr sz="1500">
+                <a:solidFill>
+                  <a:srgbClr val="22282E"/>
+                </a:solidFill>
+              </a:rPr>
+              <a:t>•  ID Token aceptado sin validar aud/iss/exp — Permite tokens de otro cliente o expirados. Valida siempre todos los claims.</a:t>
+            </a:r>
+          </a:p>
+          <a:p>
+            <a:pPr>
+              <a:spcAft>
+                <a:spcPts val="600"/>
+              </a:spcAft>
+            </a:pPr>
+            <a:r>
+              <a:rPr sz="1500">
+                <a:solidFill>
+                  <a:srgbClr val="22282E"/>
+                </a:solidFill>
+              </a:rPr>
+              <a:t>•  SSO habilitado sin MFA en el IdP — El IdP se vuelve un único punto de fallo. Refuerza el IdP con MFA fuerte.</a:t>
+            </a:r>
+          </a:p>
+          <a:p>
+            <a:pPr>
+              <a:spcAft>
+                <a:spcPts val="600"/>
+              </a:spcAft>
+            </a:pPr>
+            <a:r>
+              <a:rPr sz="1500">
+                <a:solidFill>
+                  <a:srgbClr val="22282E"/>
+                </a:solidFill>
+              </a:rPr>
+              <a:t>•  Reutilizar el mismo RelayState/sin nonce — Expone a replay/CSRF. Usa nonce/state de un solo uso y TLS.</a:t>
+            </a:r>
+          </a:p>
+          <a:p>
+            <a:pPr>
+              <a:spcAft>
+                <a:spcPts val="600"/>
+              </a:spcAft>
+            </a:pPr>
+            <a:r>
+              <a:rPr sz="1500">
+                <a:solidFill>
+                  <a:srgbClr val="22282E"/>
+                </a:solidFill>
+              </a:rPr>
+              <a:t>•  Aprovisionar JIT sin filtrar claims — Se crean cuentas con roles indebidos. Mapea claims a roles con reglas explícitas.</a:t>
+            </a:r>
+          </a:p>
+        </p:txBody>
+      </p:sp>
+    </p:spTree>
+  </p:cSld>
+  <p:clrMapOvr>
+    <a:masterClrMapping/>
+  </p:clrMapOvr>
+</p:sld>
+</file>
+
+<file path=ppt/slides/slide14.xml><?xml version="1.0" encoding="utf-8"?>
+<p:sld xmlns:a="http://schemas.openxmlformats.org/drawingml/2006/main" xmlns:p="http://schemas.openxmlformats.org/presentationml/2006/main" xmlns:r="http://schemas.openxmlformats.org/officeDocument/2006/relationships">
+  <p:cSld>
+    <p:spTree>
+      <p:nvGrpSpPr>
+        <p:cNvPr id="1" name=""/>
+        <p:cNvGrpSpPr/>
+        <p:nvPr/>
+      </p:nvGrpSpPr>
+      <p:grpSpPr/>
+      <p:sp>
+        <p:nvSpPr>
+          <p:cNvPr id="2" name="TextBox 1"/>
+          <p:cNvSpPr txBox="1"/>
+          <p:nvPr/>
+        </p:nvSpPr>
+        <p:spPr>
+          <a:xfrm>
+            <a:off x="457200" y="320040"/>
+            <a:ext cx="8229600" cy="822960"/>
+          </a:xfrm>
+          <a:prstGeom prst="rect">
+            <a:avLst/>
+          </a:prstGeom>
+          <a:noFill/>
+        </p:spPr>
+        <p:txBody>
+          <a:bodyPr wrap="square">
+            <a:spAutoFit/>
+          </a:bodyPr>
+          <a:lstStyle/>
+          <a:p>
+            <a:r>
+              <a:rPr sz="2600" b="1">
+                <a:solidFill>
+                  <a:srgbClr val="0B3D2E"/>
+                </a:solidFill>
+              </a:rPr>
+              <a:t>❓ Preguntas frecuentes</a:t>
+            </a:r>
+          </a:p>
+        </p:txBody>
+      </p:sp>
+      <p:sp>
+        <p:nvSpPr>
+          <p:cNvPr id="3" name="TextBox 2"/>
+          <p:cNvSpPr txBox="1"/>
+          <p:nvPr/>
+        </p:nvSpPr>
+        <p:spPr>
+          <a:xfrm>
+            <a:off x="457200" y="1280160"/>
+            <a:ext cx="8229600" cy="4937760"/>
+          </a:xfrm>
+          <a:prstGeom prst="rect">
+            <a:avLst/>
+          </a:prstGeom>
+          <a:noFill/>
+        </p:spPr>
+        <p:txBody>
+          <a:bodyPr wrap="square">
+            <a:spAutoFit/>
+          </a:bodyPr>
+          <a:lstStyle/>
+          <a:p>
+            <a:pPr>
+              <a:spcAft>
+                <a:spcPts val="600"/>
+              </a:spcAft>
+            </a:pPr>
+            <a:r>
+              <a:rPr sz="1500">
+                <a:solidFill>
+                  <a:srgbClr val="22282E"/>
+                </a:solidFill>
+              </a:rPr>
+              <a:t>•  ❓ ¿SAML o OIDC para una nueva aplicación?</a:t>
+            </a:r>
+          </a:p>
+          <a:p>
+            <a:pPr>
+              <a:spcAft>
+                <a:spcPts val="600"/>
+              </a:spcAft>
+            </a:pPr>
+            <a:r>
+              <a:rPr sz="1500">
+                <a:solidFill>
+                  <a:srgbClr val="22282E"/>
+                </a:solidFill>
+              </a:rPr>
+              <a:t>•  Para web empresarial con muchos SP legados, SAML sigue siendo común. Para móvil, SPA y APIs,</a:t>
+            </a:r>
+          </a:p>
+          <a:p>
+            <a:pPr>
+              <a:spcAft>
+                <a:spcPts val="600"/>
+              </a:spcAft>
+            </a:pPr>
+            <a:r>
+              <a:rPr sz="1500">
+                <a:solidFill>
+                  <a:srgbClr val="22282E"/>
+                </a:solidFill>
+              </a:rPr>
+              <a:t>•  OIDC (JSON/JWT, más ligero) es la elección moderna. Muchas organizaciones soportan ambos en su IdP.</a:t>
+            </a:r>
+          </a:p>
+          <a:p>
+            <a:pPr>
+              <a:spcAft>
+                <a:spcPts val="600"/>
+              </a:spcAft>
+            </a:pPr>
+            <a:r>
+              <a:rPr sz="1500">
+                <a:solidFill>
+                  <a:srgbClr val="22282E"/>
+                </a:solidFill>
+              </a:rPr>
+              <a:t>•  ❓ ¿La federación aumenta o reduce el riesgo?</a:t>
+            </a:r>
+          </a:p>
+          <a:p>
+            <a:pPr>
+              <a:spcAft>
+                <a:spcPts val="600"/>
+              </a:spcAft>
+            </a:pPr>
+            <a:r>
+              <a:rPr sz="1500">
+                <a:solidFill>
+                  <a:srgbClr val="22282E"/>
+                </a:solidFill>
+              </a:rPr>
+              <a:t>•  Ambos. Reduce contraseñas dispersas y centraliza la política, pero concentra el riesgo en el IdP:</a:t>
+            </a:r>
+          </a:p>
+          <a:p>
+            <a:pPr>
+              <a:spcAft>
+                <a:spcPts val="600"/>
+              </a:spcAft>
+            </a:pPr>
+            <a:r>
+              <a:rPr sz="1500">
+                <a:solidFill>
+                  <a:srgbClr val="22282E"/>
+                </a:solidFill>
+              </a:rPr>
+              <a:t>•  si cae o es comprometido, afecta a todo. Por eso el IdP exige MFA fuerte y monitorización.</a:t>
+            </a:r>
+          </a:p>
+          <a:p>
+            <a:pPr>
+              <a:spcAft>
+                <a:spcPts val="600"/>
+              </a:spcAft>
+            </a:pPr>
+            <a:r>
+              <a:rPr sz="1500">
+                <a:solidFill>
+                  <a:srgbClr val="22282E"/>
+                </a:solidFill>
+              </a:rPr>
+              <a:t>•  ❓ ¿Qué diferencia hay entre un access token y un ID token?</a:t>
+            </a:r>
+          </a:p>
+        </p:txBody>
+      </p:sp>
+    </p:spTree>
+  </p:cSld>
+  <p:clrMapOvr>
+    <a:masterClrMapping/>
+  </p:clrMapOvr>
+</p:sld>
+</file>
+
+<file path=ppt/slides/slide15.xml><?xml version="1.0" encoding="utf-8"?>
+<p:sld xmlns:a="http://schemas.openxmlformats.org/drawingml/2006/main" xmlns:p="http://schemas.openxmlformats.org/presentationml/2006/main" xmlns:r="http://schemas.openxmlformats.org/officeDocument/2006/relationships">
+  <p:cSld>
+    <p:spTree>
+      <p:nvGrpSpPr>
+        <p:cNvPr id="1" name=""/>
+        <p:cNvGrpSpPr/>
+        <p:nvPr/>
+      </p:nvGrpSpPr>
+      <p:grpSpPr/>
+      <p:sp>
+        <p:nvSpPr>
+          <p:cNvPr id="2" name="TextBox 1"/>
+          <p:cNvSpPr txBox="1"/>
+          <p:nvPr/>
+        </p:nvSpPr>
+        <p:spPr>
+          <a:xfrm>
+            <a:off x="457200" y="320040"/>
+            <a:ext cx="8229600" cy="822960"/>
+          </a:xfrm>
+          <a:prstGeom prst="rect">
+            <a:avLst/>
+          </a:prstGeom>
+          <a:noFill/>
+        </p:spPr>
+        <p:txBody>
+          <a:bodyPr wrap="square">
+            <a:spAutoFit/>
+          </a:bodyPr>
+          <a:lstStyle/>
+          <a:p>
+            <a:r>
+              <a:rPr sz="2600" b="1">
+                <a:solidFill>
+                  <a:srgbClr val="0B3D2E"/>
+                </a:solidFill>
+              </a:rPr>
+              <a:t>🔗 Referencias</a:t>
+            </a:r>
+          </a:p>
+        </p:txBody>
+      </p:sp>
+      <p:sp>
+        <p:nvSpPr>
+          <p:cNvPr id="3" name="TextBox 2"/>
+          <p:cNvSpPr txBox="1"/>
+          <p:nvPr/>
+        </p:nvSpPr>
+        <p:spPr>
+          <a:xfrm>
+            <a:off x="457200" y="1280160"/>
+            <a:ext cx="8229600" cy="4937760"/>
+          </a:xfrm>
+          <a:prstGeom prst="rect">
+            <a:avLst/>
+          </a:prstGeom>
+          <a:noFill/>
+        </p:spPr>
+        <p:txBody>
+          <a:bodyPr wrap="square">
+            <a:spAutoFit/>
+          </a:bodyPr>
+          <a:lstStyle/>
+          <a:p>
+            <a:pPr>
+              <a:spcAft>
+                <a:spcPts val="600"/>
+              </a:spcAft>
+            </a:pPr>
+            <a:r>
+              <a:rPr sz="1500">
+                <a:solidFill>
+                  <a:srgbClr val="22282E"/>
+                </a:solidFill>
+              </a:rPr>
               <a:t>•  OASIS — Security Assertion Markup Language (SAML) v2.0. &lt;https://docs.oasis-open.org/security/saml/v2.0/&gt;</a:t>
             </a:r>
           </a:p>
@@ -3644,6 +4155,81 @@
           </a:p>
         </p:txBody>
       </p:sp>
+    </p:spTree>
+  </p:cSld>
+  <p:clrMapOvr>
+    <a:masterClrMapping/>
+  </p:clrMapOvr>
+</p:sld>
+</file>
+
+<file path=ppt/slides/slide16.xml><?xml version="1.0" encoding="utf-8"?>
+<p:sld xmlns:a="http://schemas.openxmlformats.org/drawingml/2006/main" xmlns:p="http://schemas.openxmlformats.org/presentationml/2006/main" xmlns:r="http://schemas.openxmlformats.org/officeDocument/2006/relationships">
+  <p:cSld>
+    <p:spTree>
+      <p:nvGrpSpPr>
+        <p:cNvPr id="1" name=""/>
+        <p:cNvGrpSpPr/>
+        <p:nvPr/>
+      </p:nvGrpSpPr>
+      <p:grpSpPr/>
+      <p:sp>
+        <p:nvSpPr>
+          <p:cNvPr id="2" name="TextBox 1"/>
+          <p:cNvSpPr txBox="1"/>
+          <p:nvPr/>
+        </p:nvSpPr>
+        <p:spPr>
+          <a:xfrm>
+            <a:off x="457200" y="274320"/>
+            <a:ext cx="8229600" cy="640080"/>
+          </a:xfrm>
+          <a:prstGeom prst="rect">
+            <a:avLst/>
+          </a:prstGeom>
+          <a:noFill/>
+        </p:spPr>
+        <p:txBody>
+          <a:bodyPr wrap="square">
+            <a:spAutoFit/>
+          </a:bodyPr>
+          <a:lstStyle/>
+          <a:p>
+            <a:r>
+              <a:rPr sz="2200" b="1">
+                <a:solidFill>
+                  <a:srgbClr val="0B3D2E"/>
+                </a:solidFill>
+              </a:rPr>
+              <a:t>Diagrama de la clase</a:t>
+            </a:r>
+          </a:p>
+        </p:txBody>
+      </p:sp>
+      <p:pic>
+        <p:nvPicPr>
+          <p:cNvPr id="3" name="Picture 2" descr="e04541d8b21a6f93.png"/>
+          <p:cNvPicPr>
+            <a:picLocks noChangeAspect="1"/>
+          </p:cNvPicPr>
+          <p:nvPr/>
+        </p:nvPicPr>
+        <p:blipFill>
+          <a:blip r:embed="rId2"/>
+          <a:stretch>
+            <a:fillRect/>
+          </a:stretch>
+        </p:blipFill>
+        <p:spPr>
+          <a:xfrm>
+            <a:off x="457200" y="3259183"/>
+            <a:ext cx="8229599" cy="979714"/>
+          </a:xfrm>
+          <a:prstGeom prst="rect">
+            <a:avLst/>
+          </a:prstGeom>
+        </p:spPr>
+      </p:pic>
     </p:spTree>
   </p:cSld>
   <p:clrMapOvr>
@@ -4197,7 +4783,7 @@
                   <a:srgbClr val="0B3D2E"/>
                 </a:solidFill>
               </a:rPr>
-              <a:t>📖 Definiciones y características</a:t>
+              <a:t>🧠 Modelo mental y caso de decisión</a:t>
             </a:r>
           </a:p>
         </p:txBody>
@@ -4235,97 +4821,22 @@
                   <a:srgbClr val="22282E"/>
                 </a:solidFill>
               </a:rPr>
-              <a:t>•  SSO (Single Sign-On): el usuario se autentica una vez y accede a varias aplicaciones sin</a:t>
-            </a:r>
-          </a:p>
-          <a:p>
-            <a:pPr>
-              <a:spcAft>
-                <a:spcPts val="600"/>
-              </a:spcAft>
-            </a:pPr>
-            <a:r>
-              <a:rPr sz="1500">
-                <a:solidFill>
-                  <a:srgbClr val="22282E"/>
-                </a:solidFill>
-              </a:rPr>
-              <a:t>•  volver a introducir credenciales. Característica: mejora UX y reduce fatiga de contraseñas.</a:t>
-            </a:r>
-          </a:p>
-          <a:p>
-            <a:pPr>
-              <a:spcAft>
-                <a:spcPts val="600"/>
-              </a:spcAft>
-            </a:pPr>
-            <a:r>
-              <a:rPr sz="1500">
-                <a:solidFill>
-                  <a:srgbClr val="22282E"/>
-                </a:solidFill>
-              </a:rPr>
-              <a:t>•  Federación de identidad: acuerdo de confianza que permite usar una identidad de un dominio</a:t>
-            </a:r>
-          </a:p>
-          <a:p>
-            <a:pPr>
-              <a:spcAft>
-                <a:spcPts val="600"/>
-              </a:spcAft>
-            </a:pPr>
-            <a:r>
-              <a:rPr sz="1500">
-                <a:solidFill>
-                  <a:srgbClr val="22282E"/>
-                </a:solidFill>
-              </a:rPr>
-              <a:t>•  (IdP) para acceder a recursos de otro (SP). Característica: cruza fronteras organizativas.</a:t>
-            </a:r>
-          </a:p>
-          <a:p>
-            <a:pPr>
-              <a:spcAft>
-                <a:spcPts val="600"/>
-              </a:spcAft>
-            </a:pPr>
-            <a:r>
-              <a:rPr sz="1500">
-                <a:solidFill>
-                  <a:srgbClr val="22282E"/>
-                </a:solidFill>
-              </a:rPr>
-              <a:t>•  IdP (Identity Provider): autentica al usuario y emite aserciones/tokens. Es la fuente de la identidad.</a:t>
-            </a:r>
-          </a:p>
-          <a:p>
-            <a:pPr>
-              <a:spcAft>
-                <a:spcPts val="600"/>
-              </a:spcAft>
-            </a:pPr>
-            <a:r>
-              <a:rPr sz="1500">
-                <a:solidFill>
-                  <a:srgbClr val="22282E"/>
-                </a:solidFill>
-              </a:rPr>
-              <a:t>•  SP / RP (Service Provider / Relying Party): la aplicación que confía en el IdP y consume la</a:t>
-            </a:r>
-          </a:p>
-          <a:p>
-            <a:pPr>
-              <a:spcAft>
-                <a:spcPts val="600"/>
-              </a:spcAft>
-            </a:pPr>
-            <a:r>
-              <a:rPr sz="1500">
-                <a:solidFill>
-                  <a:srgbClr val="22282E"/>
-                </a:solidFill>
-              </a:rPr>
-              <a:t>•  aserción (SAML) o el token (OIDC) para dar acceso.</a:t>
+              <a:t>•  Federación separa autenticación, assertion/token, cliente y recurso. Firmar no corrige audiencia, redirect URI o autorización erróneas.</a:t>
+            </a:r>
+          </a:p>
+          <a:p>
+            <a:pPr>
+              <a:spcAft>
+                <a:spcPts val="600"/>
+              </a:spcAft>
+            </a:pPr>
+            <a:r>
+              <a:rPr sz="1500">
+                <a:solidFill>
+                  <a:srgbClr val="22282E"/>
+                </a:solidFill>
+              </a:rPr>
+              <a:t>•  Caso razonado. Un token válido para otra audiencia es aceptado. El recurso valida emisor, audiencia y contexto.</a:t>
             </a:r>
           </a:p>
         </p:txBody>
@@ -4376,7 +4887,7 @@
                   <a:srgbClr val="0B3D2E"/>
                 </a:solidFill>
               </a:rPr>
-              <a:t>🧰 Herramientas y preparación</a:t>
+              <a:t>📔 Glosario operativo complementario</a:t>
             </a:r>
           </a:p>
         </p:txBody>
@@ -4414,82 +4925,52 @@
                   <a:srgbClr val="22282E"/>
                 </a:solidFill>
               </a:rPr>
-              <a:t>•  Keycloak (open source) como IdP de laboratorio para ver SAML y OIDC en un entorno propio.</a:t>
-            </a:r>
-          </a:p>
-          <a:p>
-            <a:pPr>
-              <a:spcAft>
-                <a:spcPts val="600"/>
-              </a:spcAft>
-            </a:pPr>
-            <a:r>
-              <a:rPr sz="1500">
-                <a:solidFill>
-                  <a:srgbClr val="22282E"/>
-                </a:solidFill>
-              </a:rPr>
-              <a:t>•  jwt.io o la librería que prefieras para decodificar (no falsificar) un JWT y leer sus</a:t>
-            </a:r>
-          </a:p>
-          <a:p>
-            <a:pPr>
-              <a:spcAft>
-                <a:spcPts val="600"/>
-              </a:spcAft>
-            </a:pPr>
-            <a:r>
-              <a:rPr sz="1500">
-                <a:solidFill>
-                  <a:srgbClr val="22282E"/>
-                </a:solidFill>
-              </a:rPr>
-              <a:t>•  claims (iss, sub, aud, exp, nonce).</a:t>
-            </a:r>
-          </a:p>
-          <a:p>
-            <a:pPr>
-              <a:spcAft>
-                <a:spcPts val="600"/>
-              </a:spcAft>
-            </a:pPr>
-            <a:r>
-              <a:rPr sz="1500">
-                <a:solidFill>
-                  <a:srgbClr val="22282E"/>
-                </a:solidFill>
-              </a:rPr>
-              <a:t>•  Un analizador de tráfico del navegador (DevTools → Network) para observar redirecciones,</a:t>
-            </a:r>
-          </a:p>
-          <a:p>
-            <a:pPr>
-              <a:spcAft>
-                <a:spcPts val="600"/>
-              </a:spcAft>
-            </a:pPr>
-            <a:r>
-              <a:rPr sz="1500">
-                <a:solidFill>
-                  <a:srgbClr val="22282E"/>
-                </a:solidFill>
-              </a:rPr>
-              <a:t>•  el SAMLRequest/SAMLResponse y el authorizationcode. Todo sobre servicios propios de prueba.</a:t>
-            </a:r>
-          </a:p>
-          <a:p>
-            <a:pPr>
-              <a:spcAft>
-                <a:spcPts val="600"/>
-              </a:spcAft>
-            </a:pPr>
-            <a:r>
-              <a:rPr sz="1500">
-                <a:solidFill>
-                  <a:srgbClr val="22282E"/>
-                </a:solidFill>
-              </a:rPr>
-              <a:t>•  Especificaciones de referencia: SAML 2.0 Core (OASIS) y OpenID Connect Core 1.0.</a:t>
+              <a:t>•  Término — Definición</a:t>
+            </a:r>
+          </a:p>
+          <a:p>
+            <a:pPr>
+              <a:spcAft>
+                <a:spcPts val="600"/>
+              </a:spcAft>
+            </a:pPr>
+            <a:r>
+              <a:rPr sz="1500">
+                <a:solidFill>
+                  <a:srgbClr val="22282E"/>
+                </a:solidFill>
+              </a:rPr>
+              <a:t>•  Evidencia — Información cuya procedencia y relación con un criterio pueden revisarse.</a:t>
+            </a:r>
+          </a:p>
+          <a:p>
+            <a:pPr>
+              <a:spcAft>
+                <a:spcPts val="600"/>
+              </a:spcAft>
+            </a:pPr>
+            <a:r>
+              <a:rPr sz="1500">
+                <a:solidFill>
+                  <a:srgbClr val="22282E"/>
+                </a:solidFill>
+              </a:rPr>
+              <a:t>•  Supuesto — Condición declarada de la que depende una conclusión.</a:t>
+            </a:r>
+          </a:p>
+          <a:p>
+            <a:pPr>
+              <a:spcAft>
+                <a:spcPts val="600"/>
+              </a:spcAft>
+            </a:pPr>
+            <a:r>
+              <a:rPr sz="1500">
+                <a:solidFill>
+                  <a:srgbClr val="22282E"/>
+                </a:solidFill>
+              </a:rPr>
+              <a:t>•  Riesgo residual — Exposición que permanece después del tratamiento.</a:t>
             </a:r>
           </a:p>
         </p:txBody>
@@ -4540,7 +5021,7 @@
                   <a:srgbClr val="0B3D2E"/>
                 </a:solidFill>
               </a:rPr>
-              <a:t>🧪 Laboratorio guiado — Trazar flujos y diseñar una confianza federada</a:t>
+              <a:t>✅ Criterio de dominio</a:t>
             </a:r>
           </a:p>
         </p:txBody>
@@ -4578,97 +5059,7 @@
                   <a:srgbClr val="22282E"/>
                 </a:solidFill>
               </a:rPr>
-              <a:t>•  Mapa de actores. Para "NovaSalud", identifica el IdP corporativo y 2 SP/RP (un portal</a:t>
-            </a:r>
-          </a:p>
-          <a:p>
-            <a:pPr>
-              <a:spcAft>
-                <a:spcPts val="600"/>
-              </a:spcAft>
-            </a:pPr>
-            <a:r>
-              <a:rPr sz="1500">
-                <a:solidFill>
-                  <a:srgbClr val="22282E"/>
-                </a:solidFill>
-              </a:rPr>
-              <a:t>•  web interno vía SAML y una app móvil vía OIDC). Dibuja quién confía en quién.</a:t>
-            </a:r>
-          </a:p>
-          <a:p>
-            <a:pPr>
-              <a:spcAft>
-                <a:spcPts val="600"/>
-              </a:spcAft>
-            </a:pPr>
-            <a:r>
-              <a:rPr sz="1500">
-                <a:solidFill>
-                  <a:srgbClr val="22282E"/>
-                </a:solidFill>
-              </a:rPr>
-              <a:t>•  Flujo SAML SP-initiated. Traza los pasos: (1) usuario accede al SP → (2) SP redirige al IdP</a:t>
-            </a:r>
-          </a:p>
-          <a:p>
-            <a:pPr>
-              <a:spcAft>
-                <a:spcPts val="600"/>
-              </a:spcAft>
-            </a:pPr>
-            <a:r>
-              <a:rPr sz="1500">
-                <a:solidFill>
-                  <a:srgbClr val="22282E"/>
-                </a:solidFill>
-              </a:rPr>
-              <a:t>•  con un SAMLRequest → (3) IdP autentica → (4) IdP devuelve una SAMLResponse con la aserción</a:t>
-            </a:r>
-          </a:p>
-          <a:p>
-            <a:pPr>
-              <a:spcAft>
-                <a:spcPts val="600"/>
-              </a:spcAft>
-            </a:pPr>
-            <a:r>
-              <a:rPr sz="1500">
-                <a:solidFill>
-                  <a:srgbClr val="22282E"/>
-                </a:solidFill>
-              </a:rPr>
-              <a:t>•  firmada → (5) SP valida la firma y crea la sesión. Anota qué se firma y por qué.</a:t>
-            </a:r>
-          </a:p>
-          <a:p>
-            <a:pPr>
-              <a:spcAft>
-                <a:spcPts val="600"/>
-              </a:spcAft>
-            </a:pPr>
-            <a:r>
-              <a:rPr sz="1500">
-                <a:solidFill>
-                  <a:srgbClr val="22282E"/>
-                </a:solidFill>
-              </a:rPr>
-              <a:t>•  Metadatos y confianza. Documenta cómo se establece el trust: intercambio de metadatos</a:t>
-            </a:r>
-          </a:p>
-          <a:p>
-            <a:pPr>
-              <a:spcAft>
-                <a:spcPts val="600"/>
-              </a:spcAft>
-            </a:pPr>
-            <a:r>
-              <a:rPr sz="1500">
-                <a:solidFill>
-                  <a:srgbClr val="22282E"/>
-                </a:solidFill>
-              </a:rPr>
-              <a:t>•  (EntityID, endpoints ACS/SSO, certificado público de firma). Explica qué pasa si el certificado caduca.</a:t>
+              <a:t>•  El alumno demuestra dominio cuando explica el diagrama, resuelve el caso con evidencia, declara límites y puede defender por qué su decisión cambia si cambia un supuesto.</a:t>
             </a:r>
           </a:p>
         </p:txBody>
@@ -4719,7 +5110,7 @@
                   <a:srgbClr val="0B3D2E"/>
                 </a:solidFill>
               </a:rPr>
-              <a:t>✍️ Ejercicios</a:t>
+              <a:t>📖 Definiciones y características</a:t>
             </a:r>
           </a:p>
         </p:txBody>
@@ -4757,82 +5148,97 @@
                   <a:srgbClr val="22282E"/>
                 </a:solidFill>
               </a:rPr>
-              <a:t>•  Explica con tus palabras por qué OAuth 2.0 solo no debe usarse para "iniciar sesión".</a:t>
-            </a:r>
-          </a:p>
-          <a:p>
-            <a:pPr>
-              <a:spcAft>
-                <a:spcPts val="600"/>
-              </a:spcAft>
-            </a:pPr>
-            <a:r>
-              <a:rPr sz="1500">
-                <a:solidFill>
-                  <a:srgbClr val="22282E"/>
-                </a:solidFill>
-              </a:rPr>
-              <a:t>•  Ordena correctamente los pasos desordenados de un flujo SAML SP-initiated.</a:t>
-            </a:r>
-          </a:p>
-          <a:p>
-            <a:pPr>
-              <a:spcAft>
-                <a:spcPts val="600"/>
-              </a:spcAft>
-            </a:pPr>
-            <a:r>
-              <a:rPr sz="1500">
-                <a:solidFill>
-                  <a:srgbClr val="22282E"/>
-                </a:solidFill>
-              </a:rPr>
-              <a:t>•  Decodifica un ID Token de ejemplo y explica cada claim estándar.</a:t>
-            </a:r>
-          </a:p>
-          <a:p>
-            <a:pPr>
-              <a:spcAft>
-                <a:spcPts val="600"/>
-              </a:spcAft>
-            </a:pPr>
-            <a:r>
-              <a:rPr sz="1500">
-                <a:solidFill>
-                  <a:srgbClr val="22282E"/>
-                </a:solidFill>
-              </a:rPr>
-              <a:t>•  Diseña la tabla comparativa SAML vs. OIDC y recomienda uno para 3 escenarios distintos.</a:t>
-            </a:r>
-          </a:p>
-          <a:p>
-            <a:pPr>
-              <a:spcAft>
-                <a:spcPts val="600"/>
-              </a:spcAft>
-            </a:pPr>
-            <a:r>
-              <a:rPr sz="1500">
-                <a:solidFill>
-                  <a:srgbClr val="22282E"/>
-                </a:solidFill>
-              </a:rPr>
-              <a:t>•  Describe el ataque de XML Signature Wrapping a alto nivel y su mitigación defensiva.</a:t>
-            </a:r>
-          </a:p>
-          <a:p>
-            <a:pPr>
-              <a:spcAft>
-                <a:spcPts val="600"/>
-              </a:spcAft>
-            </a:pPr>
-            <a:r>
-              <a:rPr sz="1500">
-                <a:solidFill>
-                  <a:srgbClr val="22282E"/>
-                </a:solidFill>
-              </a:rPr>
-              <a:t>•  Dibuja el trust de una federación con 1 IdP y 3 SP e indica qué se comparte con cada uno.</a:t>
+              <a:t>•  SSO (Single Sign-On): el usuario se autentica una vez y accede a varias aplicaciones sin</a:t>
+            </a:r>
+          </a:p>
+          <a:p>
+            <a:pPr>
+              <a:spcAft>
+                <a:spcPts val="600"/>
+              </a:spcAft>
+            </a:pPr>
+            <a:r>
+              <a:rPr sz="1500">
+                <a:solidFill>
+                  <a:srgbClr val="22282E"/>
+                </a:solidFill>
+              </a:rPr>
+              <a:t>•  volver a introducir credenciales. Característica: mejora UX y reduce fatiga de contraseñas.</a:t>
+            </a:r>
+          </a:p>
+          <a:p>
+            <a:pPr>
+              <a:spcAft>
+                <a:spcPts val="600"/>
+              </a:spcAft>
+            </a:pPr>
+            <a:r>
+              <a:rPr sz="1500">
+                <a:solidFill>
+                  <a:srgbClr val="22282E"/>
+                </a:solidFill>
+              </a:rPr>
+              <a:t>•  Federación de identidad: acuerdo de confianza que permite usar una identidad de un dominio</a:t>
+            </a:r>
+          </a:p>
+          <a:p>
+            <a:pPr>
+              <a:spcAft>
+                <a:spcPts val="600"/>
+              </a:spcAft>
+            </a:pPr>
+            <a:r>
+              <a:rPr sz="1500">
+                <a:solidFill>
+                  <a:srgbClr val="22282E"/>
+                </a:solidFill>
+              </a:rPr>
+              <a:t>•  (IdP) para acceder a recursos de otro (SP). Característica: cruza fronteras organizativas.</a:t>
+            </a:r>
+          </a:p>
+          <a:p>
+            <a:pPr>
+              <a:spcAft>
+                <a:spcPts val="600"/>
+              </a:spcAft>
+            </a:pPr>
+            <a:r>
+              <a:rPr sz="1500">
+                <a:solidFill>
+                  <a:srgbClr val="22282E"/>
+                </a:solidFill>
+              </a:rPr>
+              <a:t>•  IdP (Identity Provider): autentica al usuario y emite aserciones/tokens. Es la fuente de la identidad.</a:t>
+            </a:r>
+          </a:p>
+          <a:p>
+            <a:pPr>
+              <a:spcAft>
+                <a:spcPts val="600"/>
+              </a:spcAft>
+            </a:pPr>
+            <a:r>
+              <a:rPr sz="1500">
+                <a:solidFill>
+                  <a:srgbClr val="22282E"/>
+                </a:solidFill>
+              </a:rPr>
+              <a:t>•  SP / RP (Service Provider / Relying Party): la aplicación que confía en el IdP y consume la</a:t>
+            </a:r>
+          </a:p>
+          <a:p>
+            <a:pPr>
+              <a:spcAft>
+                <a:spcPts val="600"/>
+              </a:spcAft>
+            </a:pPr>
+            <a:r>
+              <a:rPr sz="1500">
+                <a:solidFill>
+                  <a:srgbClr val="22282E"/>
+                </a:solidFill>
+              </a:rPr>
+              <a:t>•  aserción (SAML) o el token (OIDC) para dar acceso.</a:t>
             </a:r>
           </a:p>
         </p:txBody>
@@ -4883,7 +5289,7 @@
                   <a:srgbClr val="0B3D2E"/>
                 </a:solidFill>
               </a:rPr>
-              <a:t>📝 Reto verificable</a:t>
+              <a:t>🧰 Herramientas y preparación</a:t>
             </a:r>
           </a:p>
         </p:txBody>
@@ -4921,82 +5327,82 @@
                   <a:srgbClr val="22282E"/>
                 </a:solidFill>
               </a:rPr>
-              <a:t>•  Entrega un Diseño de Arquitectura de SSO Federado para NovaSalud que incluya: diagrama de</a:t>
-            </a:r>
-          </a:p>
-          <a:p>
-            <a:pPr>
-              <a:spcAft>
-                <a:spcPts val="600"/>
-              </a:spcAft>
-            </a:pPr>
-            <a:r>
-              <a:rPr sz="1500">
-                <a:solidFill>
-                  <a:srgbClr val="22282E"/>
-                </a:solidFill>
-              </a:rPr>
-              <a:t>•  actores (IdP/SP/RP), los dos flujos (SAML y OIDC) paso a paso, la tabla de metadatos/confianza, un</a:t>
-            </a:r>
-          </a:p>
-          <a:p>
-            <a:pPr>
-              <a:spcAft>
-                <a:spcPts val="600"/>
-              </a:spcAft>
-            </a:pPr>
-            <a:r>
-              <a:rPr sz="1500">
-                <a:solidFill>
-                  <a:srgbClr val="22282E"/>
-                </a:solidFill>
-              </a:rPr>
-              <a:t>•  modelo de amenazas con al menos 4 riesgos y mitigaciones, y la regla de aprovisionamiento JIT.</a:t>
-            </a:r>
-          </a:p>
-          <a:p>
-            <a:pPr>
-              <a:spcAft>
-                <a:spcPts val="600"/>
-              </a:spcAft>
-            </a:pPr>
-            <a:r>
-              <a:rPr sz="1500">
-                <a:solidFill>
-                  <a:srgbClr val="22282E"/>
-                </a:solidFill>
-              </a:rPr>
-              <a:t>•  Criterio de aceptación: un arquitecto que reciba tu diseño puede explicar, sin ayuda, qué</a:t>
-            </a:r>
-          </a:p>
-          <a:p>
-            <a:pPr>
-              <a:spcAft>
-                <a:spcPts val="600"/>
-              </a:spcAft>
-            </a:pPr>
-            <a:r>
-              <a:rPr sz="1500">
-                <a:solidFill>
-                  <a:srgbClr val="22282E"/>
-                </a:solidFill>
-              </a:rPr>
-              <a:t>•  sistema autentica, qué token viaja en cada flujo, qué se valida para aceptarlo y cómo se mitiga el</a:t>
-            </a:r>
-          </a:p>
-          <a:p>
-            <a:pPr>
-              <a:spcAft>
-                <a:spcPts val="600"/>
-              </a:spcAft>
-            </a:pPr>
-            <a:r>
-              <a:rPr sz="1500">
-                <a:solidFill>
-                  <a:srgbClr val="22282E"/>
-                </a:solidFill>
-              </a:rPr>
-              <a:t>•  robo de aserción/token.</a:t>
+              <a:t>•  Keycloak (open source) como IdP de laboratorio para ver SAML y OIDC en un entorno propio.</a:t>
+            </a:r>
+          </a:p>
+          <a:p>
+            <a:pPr>
+              <a:spcAft>
+                <a:spcPts val="600"/>
+              </a:spcAft>
+            </a:pPr>
+            <a:r>
+              <a:rPr sz="1500">
+                <a:solidFill>
+                  <a:srgbClr val="22282E"/>
+                </a:solidFill>
+              </a:rPr>
+              <a:t>•  jwt.io o la librería que prefieras para decodificar (no falsificar) un JWT y leer sus</a:t>
+            </a:r>
+          </a:p>
+          <a:p>
+            <a:pPr>
+              <a:spcAft>
+                <a:spcPts val="600"/>
+              </a:spcAft>
+            </a:pPr>
+            <a:r>
+              <a:rPr sz="1500">
+                <a:solidFill>
+                  <a:srgbClr val="22282E"/>
+                </a:solidFill>
+              </a:rPr>
+              <a:t>•  claims (iss, sub, aud, exp, nonce).</a:t>
+            </a:r>
+          </a:p>
+          <a:p>
+            <a:pPr>
+              <a:spcAft>
+                <a:spcPts val="600"/>
+              </a:spcAft>
+            </a:pPr>
+            <a:r>
+              <a:rPr sz="1500">
+                <a:solidFill>
+                  <a:srgbClr val="22282E"/>
+                </a:solidFill>
+              </a:rPr>
+              <a:t>•  Un analizador de tráfico del navegador (DevTools → Network) para observar redirecciones,</a:t>
+            </a:r>
+          </a:p>
+          <a:p>
+            <a:pPr>
+              <a:spcAft>
+                <a:spcPts val="600"/>
+              </a:spcAft>
+            </a:pPr>
+            <a:r>
+              <a:rPr sz="1500">
+                <a:solidFill>
+                  <a:srgbClr val="22282E"/>
+                </a:solidFill>
+              </a:rPr>
+              <a:t>•  el SAMLRequest/SAMLResponse y el authorizationcode. Todo sobre servicios propios de prueba.</a:t>
+            </a:r>
+          </a:p>
+          <a:p>
+            <a:pPr>
+              <a:spcAft>
+                <a:spcPts val="600"/>
+              </a:spcAft>
+            </a:pPr>
+            <a:r>
+              <a:rPr sz="1500">
+                <a:solidFill>
+                  <a:srgbClr val="22282E"/>
+                </a:solidFill>
+              </a:rPr>
+              <a:t>•  Especificaciones de referencia: SAML 2.0 Core (OASIS) y OpenID Connect Core 1.0.</a:t>
             </a:r>
           </a:p>
         </p:txBody>
